--- a/Fase 1/Evidencias Grupales/Presentación Proyecto.pptx
+++ b/Fase 1/Evidencias Grupales/Presentación Proyecto.pptx
@@ -5552,7 +5552,7 @@
                   <a:srgbClr val="16B8D4"/>
                 </a:solidFill>
               </a:rPr>
-              <a:t>Equipo desarrollador JJV · Septiembre 2026</a:t>
+              <a:t>Equipo desarrollador JJV · Agosto 2026</a:t>
             </a:r>
             <a:endParaRPr/>
           </a:p>
@@ -8625,7 +8625,7 @@
                   <a:srgbClr val="0B1F33"/>
                 </a:solidFill>
               </a:rPr>
-              <a:t>El proyecto se desarrolla de septiembre a diciembre de 2026</a:t>
+              <a:t>El proyecto se desarrolla de agosto a diciembre de 2026</a:t>
             </a:r>
             <a:endParaRPr/>
           </a:p>
